--- a/slides/Toan11/Slide_TOAN11_Bai4_T8-9.pptx
+++ b/slides/Toan11/Slide_TOAN11_Bai4_T8-9.pptx
@@ -4403,7 +4403,7 @@
                 </a:pPr>
                 <a:r>
                   <a:rPr lang="vi-VN"/>
-                  <a:t>\tan\ x=-\sqrt{3}\Leftrightarrow x=−\frac{\pi}{3}+k\pi</a:t>
+                  <a:t>\tan\ x=−\sqrt{3}\Leftrightarrow x=−\frac{\pi}{3}+k\pi</a:t>
                 </a:r>
               </a:p>
               <a:p>
@@ -4419,7 +4419,7 @@
                 </a:pPr>
                 <a:r>
                   <a:rPr lang="vi-VN"/>
-                  <a:t>\cot\ x=-\sqrt{3}\Leftrightarrow x=−\frac{\pi}{6}+k\pi</a:t>
+                  <a:t>\cot\ x=−\sqrt{3}\Leftrightarrow x=−\frac{\pi}{6}+k\pi</a:t>
                 </a:r>
               </a:p>
             </p:txBody>
@@ -6058,7 +6058,7 @@
                 </a:r>
                 <a:r>
                   <a:rPr lang="vi-VN"/>
-                  <a:t>F=\frac{1}{2}(1-\cos\ \alpha)</a:t>
+                  <a:t>F=\frac{1}{2}(1−\cos\ \alpha)</a:t>
                 </a:r>
               </a:p>
               <a:p>
@@ -8525,7 +8525,7 @@
                 </a:pPr>
                 <a:r>
                   <a:rPr lang="vi-VN"/>
-                  <a:t>\frac{x-1}{x+1}=0</a:t>
+                  <a:t>\frac{x−1}{x+1}=0</a:t>
                 </a:r>
                 <a:r>
                   <a:rPr sz="2400">
@@ -8538,7 +8538,7 @@
                 </a:r>
                 <a:r>
                   <a:rPr lang="vi-VN"/>
-                  <a:t>x^2-1=0</a:t>
+                  <a:t>x^2−1=0</a:t>
                 </a:r>
                 <a:r>
                   <a:rPr sz="2400">
@@ -9670,7 +9670,7 @@
                 </a:pPr>
                 <a:r>
                   <a:rPr lang="vi-VN"/>
-                  <a:t>\sin\ x=-1\Leftrightarrow x=−\frac{\pi}{2}+k2\pi</a:t>
+                  <a:t>\sin\ x=−1\Leftrightarrow x=−\frac{\pi}{2}+k2\pi</a:t>
                 </a:r>
               </a:p>
             </p:txBody>
@@ -9943,7 +9943,7 @@
                 </a:r>
                 <a:r>
                   <a:rPr lang="vi-VN"/>
-                  <a:t>x=\pi-\alpha+k2\pi</a:t>
+                  <a:t>x=\pi−\alpha+k2\pi</a:t>
                 </a:r>
               </a:p>
             </p:txBody>
